--- a/public/retrieval-retrieval-roulette-template.pptx
+++ b/public/retrieval-retrieval-roulette-template.pptx
@@ -2,13 +2,13 @@
 <file path=ppt/presentation.xml><?xml version="1.0" encoding="utf-8"?>
 <p:presentation xmlns:p="http://schemas.openxmlformats.org/presentationml/2006/main">
   <p:sldMasterIdLst>
-    <p:sldMasterId xmlns:r="http://schemas.openxmlformats.org/officeDocument/2006/relationships" id="2147483648" r:id="R7b629b15bab3465c"/>
+    <p:sldMasterId xmlns:r="http://schemas.openxmlformats.org/officeDocument/2006/relationships" id="2147483648" r:id="Rcf1480239586435b"/>
   </p:sldMasterIdLst>
   <p:notesMasterIdLst>
-    <p:notesMasterId xmlns:r="http://schemas.openxmlformats.org/officeDocument/2006/relationships" r:id="R8ea100f2cb2a48c8"/>
+    <p:notesMasterId xmlns:r="http://schemas.openxmlformats.org/officeDocument/2006/relationships" r:id="Rf27ea73283d94a8b"/>
   </p:notesMasterIdLst>
   <p:sldIdLst>
-    <p:sldId xmlns:r="http://schemas.openxmlformats.org/officeDocument/2006/relationships" id="256" r:id="R91a98ee13379432d"/>
+    <p:sldId xmlns:r="http://schemas.openxmlformats.org/officeDocument/2006/relationships" id="256" r:id="R29b75c4444254a67"/>
   </p:sldIdLst>
   <p:sldSz cx="12192000" cy="6858000"/>
   <p:notesSz cx="6858000" cy="9144000"/>
@@ -442,7 +442,7 @@
           <a:lstStyle xmlns:a="http://schemas.openxmlformats.org/drawingml/2006/main"/>
           <a:p xmlns:a="http://schemas.openxmlformats.org/drawingml/2006/main">
             <a:r>
-              <a:t>Teacher setup: Replace bracketed text before teaching. Every text box is editable. Duplicate the slide for checked answers or a second prompt. Keep prompt and answer sides separate when printing cards.</a:t>
+              <a:t>Teacher setup: Replace bracketed text before teaching. All text and shapes are editable. Duplicate the slide for answers or another prompt. For card activities, separate prompt and answer sides before printing.</a:t>
             </a:r>
           </a:p>
           <a:p xmlns:a="http://schemas.openxmlformats.org/drawingml/2006/main">
@@ -452,17 +452,12 @@
           </a:p>
           <a:p xmlns:a="http://schemas.openxmlformats.org/drawingml/2006/main">
             <a:r>
-              <a:t>Activity: Retrieval Roulette</a:t>
-            </a:r>
-          </a:p>
-          <a:p xmlns:a="http://schemas.openxmlformats.org/drawingml/2006/main">
-            <a:r>
               <a:t>Materials: Your own checked prompt bank or Boxer’s linked template</a:t>
             </a:r>
           </a:p>
           <a:p xmlns:a="http://schemas.openxmlformats.org/drawingml/2006/main">
             <a:r>
-              <a:t>Suggested total time including feedback: 7 minutes.</a:t>
+              <a:t>Suggested time including feedback: 7 minutes.</a:t>
             </a:r>
           </a:p>
           <a:p xmlns:a="http://schemas.openxmlformats.org/drawingml/2006/main">
@@ -505,26 +500,6 @@
               <a:t>Adapt: Start with a small bank you can maintain; select a manageable number of prompts.</a:t>
             </a:r>
           </a:p>
-          <a:p xmlns:a="http://schemas.openxmlformats.org/drawingml/2006/main">
-            <a:r>
-              <a:t>Credit: Adam Boxer — Retrieval Roulette</a:t>
-            </a:r>
-          </a:p>
-          <a:p xmlns:a="http://schemas.openxmlformats.org/drawingml/2006/main">
-            <a:r>
-              <a:t>Boxer published Retrieval Roulette in 2017. His tool selects questions; the TNT activity wheel selects activity formats and is a separate feature.</a:t>
-            </a:r>
-          </a:p>
-          <a:p xmlns:a="http://schemas.openxmlformats.org/drawingml/2006/main">
-            <a:r>
-              <a:t>Source: https://achemicalorthodoxy.co.uk/2017/05/04/the-retrieval-roulette/</a:t>
-            </a:r>
-          </a:p>
-          <a:p xmlns:a="http://schemas.openxmlformats.org/drawingml/2006/main">
-            <a:r>
-              <a:t>Full guide: https://tnt-teaching-tools.github.io/cold-call-classroom/retrieval-retrieval-roulette.html</a:t>
-            </a:r>
-          </a:p>
         </p:txBody>
       </p:sp>
       <p:sp>
@@ -569,7 +544,7 @@
           <p:cNvPr id="4" name="Accent rule">
             <a:extLst xmlns:a="http://schemas.openxmlformats.org/drawingml/2006/main">
               <a:ext uri="{FF2B5EF4-FFF2-40B4-BE49-F238E27FC236}">
-                <a16:creationId xmlns:a16="http://schemas.microsoft.com/office/drawing/2014/main" id="{8EC70FF0-7E9A-4A9E-9F16-320D7F3F6D9A}"/>
+                <a16:creationId xmlns:a16="http://schemas.microsoft.com/office/drawing/2014/main" id="{CEF22C6B-7D3A-4A9E-A0FA-4364448BB7F5}"/>
               </a:ext>
             </a:extLst>
           </p:cNvPr>
@@ -600,7 +575,7 @@
           <p:cNvPr id="2" name="Title">
             <a:extLst xmlns:a="http://schemas.openxmlformats.org/drawingml/2006/main">
               <a:ext uri="{FF2B5EF4-FFF2-40B4-BE49-F238E27FC236}">
-                <a16:creationId xmlns:a16="http://schemas.microsoft.com/office/drawing/2014/main" id="{0F890425-2AC0-4E8A-9E90-21A3ED7B7807}"/>
+                <a16:creationId xmlns:a16="http://schemas.microsoft.com/office/drawing/2014/main" id="{68D5FA2B-E354-4BB2-A09C-CEA88C979A09}"/>
               </a:ext>
             </a:extLst>
           </p:cNvPr>
@@ -747,7 +722,7 @@
           <p:cNvPr id="3" name="Subtitle">
             <a:extLst xmlns:a="http://schemas.openxmlformats.org/drawingml/2006/main">
               <a:ext uri="{FF2B5EF4-FFF2-40B4-BE49-F238E27FC236}">
-                <a16:creationId xmlns:a16="http://schemas.microsoft.com/office/drawing/2014/main" id="{C64D17EC-0A3E-4BE8-B478-A8E7078F54E8}"/>
+                <a16:creationId xmlns:a16="http://schemas.microsoft.com/office/drawing/2014/main" id="{D3E80DD2-9A9C-48B3-B10A-1AC8836D42E6}"/>
               </a:ext>
             </a:extLst>
           </p:cNvPr>
@@ -911,7 +886,7 @@
           <p:cNvPr id="3" name="Accent rule">
             <a:extLst xmlns:a="http://schemas.openxmlformats.org/drawingml/2006/main">
               <a:ext uri="{FF2B5EF4-FFF2-40B4-BE49-F238E27FC236}">
-                <a16:creationId xmlns:a16="http://schemas.microsoft.com/office/drawing/2014/main" id="{E2587D23-E256-4FD9-A5D6-C97E1A26F39C}"/>
+                <a16:creationId xmlns:a16="http://schemas.microsoft.com/office/drawing/2014/main" id="{CE6F0672-49B5-4F3A-89C5-0A0FEEA870A3}"/>
               </a:ext>
             </a:extLst>
           </p:cNvPr>
@@ -942,7 +917,7 @@
           <p:cNvPr id="2" name="Section title">
             <a:extLst xmlns:a="http://schemas.openxmlformats.org/drawingml/2006/main">
               <a:ext uri="{FF2B5EF4-FFF2-40B4-BE49-F238E27FC236}">
-                <a16:creationId xmlns:a16="http://schemas.microsoft.com/office/drawing/2014/main" id="{B5386A12-AABE-41C8-B9FF-B9C3D4A9E247}"/>
+                <a16:creationId xmlns:a16="http://schemas.microsoft.com/office/drawing/2014/main" id="{E96A357F-FA54-4BBC-ACAB-86E60480B731}"/>
               </a:ext>
             </a:extLst>
           </p:cNvPr>
@@ -1106,7 +1081,7 @@
           <p:cNvPr id="4" name="Accent rule">
             <a:extLst xmlns:a="http://schemas.openxmlformats.org/drawingml/2006/main">
               <a:ext uri="{FF2B5EF4-FFF2-40B4-BE49-F238E27FC236}">
-                <a16:creationId xmlns:a16="http://schemas.microsoft.com/office/drawing/2014/main" id="{F73ABB2A-3CFB-4FD0-A8CB-F2B2515A8FB2}"/>
+                <a16:creationId xmlns:a16="http://schemas.microsoft.com/office/drawing/2014/main" id="{376810DD-6FDA-46D3-A9C0-33C4A16DCDDF}"/>
               </a:ext>
             </a:extLst>
           </p:cNvPr>
@@ -1137,7 +1112,7 @@
           <p:cNvPr id="2" name="Title">
             <a:extLst xmlns:a="http://schemas.openxmlformats.org/drawingml/2006/main">
               <a:ext uri="{FF2B5EF4-FFF2-40B4-BE49-F238E27FC236}">
-                <a16:creationId xmlns:a16="http://schemas.microsoft.com/office/drawing/2014/main" id="{9AED95CF-F54E-4A4A-AB69-B4159F6D9DC0}"/>
+                <a16:creationId xmlns:a16="http://schemas.microsoft.com/office/drawing/2014/main" id="{A53357CC-6018-4699-8255-BC3F73F1A6DD}"/>
               </a:ext>
             </a:extLst>
           </p:cNvPr>
@@ -1284,7 +1259,7 @@
           <p:cNvPr id="3" name="Body">
             <a:extLst xmlns:a="http://schemas.openxmlformats.org/drawingml/2006/main">
               <a:ext uri="{FF2B5EF4-FFF2-40B4-BE49-F238E27FC236}">
-                <a16:creationId xmlns:a16="http://schemas.microsoft.com/office/drawing/2014/main" id="{5EB5F066-BD14-44FF-AE15-3FAE7107D475}"/>
+                <a16:creationId xmlns:a16="http://schemas.microsoft.com/office/drawing/2014/main" id="{9B4F9567-DD9E-4A46-B8DA-398EF64F9713}"/>
               </a:ext>
             </a:extLst>
           </p:cNvPr>
@@ -1448,7 +1423,7 @@
           <p:cNvPr id="5" name="Accent rule">
             <a:extLst xmlns:a="http://schemas.openxmlformats.org/drawingml/2006/main">
               <a:ext uri="{FF2B5EF4-FFF2-40B4-BE49-F238E27FC236}">
-                <a16:creationId xmlns:a16="http://schemas.microsoft.com/office/drawing/2014/main" id="{1796479F-7EDB-41B8-A2D2-400ED2A760C2}"/>
+                <a16:creationId xmlns:a16="http://schemas.microsoft.com/office/drawing/2014/main" id="{0286FCF6-518F-4BD8-99D8-0A11C73BD8A9}"/>
               </a:ext>
             </a:extLst>
           </p:cNvPr>
@@ -1479,7 +1454,7 @@
           <p:cNvPr id="2" name="Title">
             <a:extLst xmlns:a="http://schemas.openxmlformats.org/drawingml/2006/main">
               <a:ext uri="{FF2B5EF4-FFF2-40B4-BE49-F238E27FC236}">
-                <a16:creationId xmlns:a16="http://schemas.microsoft.com/office/drawing/2014/main" id="{57F462F6-E6C1-4E53-9AE7-5DC7B4097834}"/>
+                <a16:creationId xmlns:a16="http://schemas.microsoft.com/office/drawing/2014/main" id="{D5F4D70A-7467-4B16-BCD2-E545D90D76A3}"/>
               </a:ext>
             </a:extLst>
           </p:cNvPr>
@@ -1626,7 +1601,7 @@
           <p:cNvPr id="3" name="Left column">
             <a:extLst xmlns:a="http://schemas.openxmlformats.org/drawingml/2006/main">
               <a:ext uri="{FF2B5EF4-FFF2-40B4-BE49-F238E27FC236}">
-                <a16:creationId xmlns:a16="http://schemas.microsoft.com/office/drawing/2014/main" id="{AEDF4B12-8B79-4564-B9D7-30A247F4F22E}"/>
+                <a16:creationId xmlns:a16="http://schemas.microsoft.com/office/drawing/2014/main" id="{B69438FC-C261-4758-959D-A6A3CD4A1B69}"/>
               </a:ext>
             </a:extLst>
           </p:cNvPr>
@@ -1773,7 +1748,7 @@
           <p:cNvPr id="4" name="Right column">
             <a:extLst xmlns:a="http://schemas.openxmlformats.org/drawingml/2006/main">
               <a:ext uri="{FF2B5EF4-FFF2-40B4-BE49-F238E27FC236}">
-                <a16:creationId xmlns:a16="http://schemas.microsoft.com/office/drawing/2014/main" id="{FA3E9B29-7701-40BA-9E47-961EAD8AB4DF}"/>
+                <a16:creationId xmlns:a16="http://schemas.microsoft.com/office/drawing/2014/main" id="{890561D9-47CD-4C7C-A022-6E26AE1826C1}"/>
               </a:ext>
             </a:extLst>
           </p:cNvPr>
@@ -1937,7 +1912,7 @@
           <p:cNvPr id="4" name="Accent rule">
             <a:extLst xmlns:a="http://schemas.openxmlformats.org/drawingml/2006/main">
               <a:ext uri="{FF2B5EF4-FFF2-40B4-BE49-F238E27FC236}">
-                <a16:creationId xmlns:a16="http://schemas.microsoft.com/office/drawing/2014/main" id="{5E37148C-CD0C-4307-BD49-F9127F4DC943}"/>
+                <a16:creationId xmlns:a16="http://schemas.microsoft.com/office/drawing/2014/main" id="{A7E7BD87-F046-4B25-A3A0-AD89EC5FABB2}"/>
               </a:ext>
             </a:extLst>
           </p:cNvPr>
@@ -1968,7 +1943,7 @@
           <p:cNvPr id="2" name="Title">
             <a:extLst xmlns:a="http://schemas.openxmlformats.org/drawingml/2006/main">
               <a:ext uri="{FF2B5EF4-FFF2-40B4-BE49-F238E27FC236}">
-                <a16:creationId xmlns:a16="http://schemas.microsoft.com/office/drawing/2014/main" id="{901C9E7A-7EC1-4455-AAB6-21DB4CEAEB9A}"/>
+                <a16:creationId xmlns:a16="http://schemas.microsoft.com/office/drawing/2014/main" id="{A9D2C1AB-6898-4348-B9D1-200DA1EFC60C}"/>
               </a:ext>
             </a:extLst>
           </p:cNvPr>
@@ -2115,7 +2090,7 @@
           <p:cNvPr id="3" name="Left column">
             <a:extLst xmlns:a="http://schemas.openxmlformats.org/drawingml/2006/main">
               <a:ext uri="{FF2B5EF4-FFF2-40B4-BE49-F238E27FC236}">
-                <a16:creationId xmlns:a16="http://schemas.microsoft.com/office/drawing/2014/main" id="{AD9D3B1A-E9CE-44A6-A853-80892A49D501}"/>
+                <a16:creationId xmlns:a16="http://schemas.microsoft.com/office/drawing/2014/main" id="{2997E3DD-1A26-4A14-96F9-7173C8905DE5}"/>
               </a:ext>
             </a:extLst>
           </p:cNvPr>
@@ -2300,12 +2275,12 @@
   </p:cSld>
   <p:clrMap bg1="lt1" tx1="dk1" bg2="lt2" tx2="dk2" accent1="accent1" accent2="accent2" accent3="accent3" accent4="accent4" accent5="accent5" accent6="accent6" hlink="hlink" folHlink="folHlink"/>
   <p:sldLayoutIdLst>
-    <p:sldLayoutId xmlns:r="http://schemas.openxmlformats.org/officeDocument/2006/relationships" id="2147483649" r:id="R518416d7d8744a1e"/>
-    <p:sldLayoutId xmlns:r="http://schemas.openxmlformats.org/officeDocument/2006/relationships" id="2147483650" r:id="Raed169ca3a394a2d"/>
-    <p:sldLayoutId xmlns:r="http://schemas.openxmlformats.org/officeDocument/2006/relationships" id="2147483651" r:id="Rf6360da20c6e468e"/>
-    <p:sldLayoutId xmlns:r="http://schemas.openxmlformats.org/officeDocument/2006/relationships" id="2147483652" r:id="R297420f646e2492b"/>
-    <p:sldLayoutId xmlns:r="http://schemas.openxmlformats.org/officeDocument/2006/relationships" id="2147483653" r:id="Rc21f79078b4c4fa1"/>
-    <p:sldLayoutId xmlns:r="http://schemas.openxmlformats.org/officeDocument/2006/relationships" id="2147483654" r:id="R9ec3d83a8e7244d8"/>
+    <p:sldLayoutId xmlns:r="http://schemas.openxmlformats.org/officeDocument/2006/relationships" id="2147483649" r:id="R7205f4d87b5a4f79"/>
+    <p:sldLayoutId xmlns:r="http://schemas.openxmlformats.org/officeDocument/2006/relationships" id="2147483650" r:id="R33fea9cf31b14790"/>
+    <p:sldLayoutId xmlns:r="http://schemas.openxmlformats.org/officeDocument/2006/relationships" id="2147483651" r:id="Re54571d678bc4904"/>
+    <p:sldLayoutId xmlns:r="http://schemas.openxmlformats.org/officeDocument/2006/relationships" id="2147483652" r:id="Re6993ce20b6343d9"/>
+    <p:sldLayoutId xmlns:r="http://schemas.openxmlformats.org/officeDocument/2006/relationships" id="2147483653" r:id="Ra71907aaa6e74d08"/>
+    <p:sldLayoutId xmlns:r="http://schemas.openxmlformats.org/officeDocument/2006/relationships" id="2147483654" r:id="R97d64f2aba764232"/>
   </p:sldLayoutIdLst>
   <p:txStyles>
     <p:titleStyle>
@@ -2838,7 +2813,7 @@
     <p:bg>
       <p:bgPr>
         <a:solidFill xmlns:a="http://schemas.openxmlformats.org/drawingml/2006/main">
-          <a:srgbClr val="FFFCF2"/>
+          <a:srgbClr val="FFFDF5"/>
         </a:solidFill>
       </p:bgPr>
     </p:bg>
@@ -2853,10 +2828,10 @@
       </p:grpSpPr>
       <p:sp>
         <p:nvSpPr>
-          <p:cNvPr id="10" name="">
+          <p:cNvPr id="29" name="">
             <a:extLst xmlns:a="http://schemas.openxmlformats.org/drawingml/2006/main">
               <a:ext uri="{FF2B5EF4-FFF2-40B4-BE49-F238E27FC236}">
-                <a16:creationId xmlns:a16="http://schemas.microsoft.com/office/drawing/2014/main" id="{26D57B22-DE74-49A0-9E60-E63F68017ED7}"/>
+                <a16:creationId xmlns:a16="http://schemas.microsoft.com/office/drawing/2014/main" id="{6CDD96AF-2D13-4277-9B87-529443FC39E3}"/>
               </a:ext>
             </a:extLst>
           </p:cNvPr>
@@ -2867,8 +2842,8 @@
         </p:nvSpPr>
         <p:spPr>
           <a:xfrm xmlns:a="http://schemas.openxmlformats.org/drawingml/2006/main">
-            <a:off x="609600" y="333375"/>
-            <a:ext cx="10972800" cy="714375"/>
+            <a:off x="609600" y="323850"/>
+            <a:ext cx="10972800" cy="666750"/>
           </a:xfrm>
           <a:prstGeom xmlns:a="http://schemas.openxmlformats.org/drawingml/2006/main" prst="rect">
             <a:avLst/>
@@ -2885,23 +2860,23 @@
           <a:lstStyle xmlns:a="http://schemas.openxmlformats.org/drawingml/2006/main"/>
           <a:p xmlns:a="http://schemas.openxmlformats.org/drawingml/2006/main">
             <a:pPr>
-              <a:defRPr sz="4050" b="1">
+              <a:defRPr sz="3450" b="1">
                 <a:solidFill>
-                  <a:srgbClr val="242720"/>
+                  <a:srgbClr val="263C3A"/>
                 </a:solidFill>
-                <a:latin typeface="Arial"/>
-                <a:ea typeface="Arial"/>
-                <a:cs typeface="Arial"/>
+                <a:latin typeface="DejaVu Sans"/>
+                <a:ea typeface="DejaVu Sans"/>
+                <a:cs typeface="DejaVu Sans"/>
               </a:defRPr>
             </a:pPr>
             <a:r>
-              <a:rPr sz="4050" b="1">
+              <a:rPr sz="3450" b="1">
                 <a:solidFill>
-                  <a:srgbClr val="242720"/>
+                  <a:srgbClr val="263C3A"/>
                 </a:solidFill>
-                <a:latin typeface="Arial"/>
-                <a:ea typeface="Arial"/>
-                <a:cs typeface="Arial"/>
+                <a:latin typeface="DejaVu Sans"/>
+                <a:ea typeface="DejaVu Sans"/>
+                <a:cs typeface="DejaVu Sans"/>
               </a:rPr>
               <a:t>Retrieval Roulette</a:t>
             </a:r>
@@ -2913,7 +2888,7 @@
           <p:cNvPr id="2" name="">
             <a:extLst xmlns:a="http://schemas.openxmlformats.org/drawingml/2006/main">
               <a:ext uri="{FF2B5EF4-FFF2-40B4-BE49-F238E27FC236}">
-                <a16:creationId xmlns:a16="http://schemas.microsoft.com/office/drawing/2014/main" id="{7C1CE777-2956-4E8A-B9AD-8C501A1E785A}"/>
+                <a16:creationId xmlns:a16="http://schemas.microsoft.com/office/drawing/2014/main" id="{5D890E68-52DA-49CD-80C3-E0F3CE881CC0}"/>
               </a:ext>
             </a:extLst>
           </p:cNvPr>
@@ -2924,8 +2899,8 @@
         </p:nvSpPr>
         <p:spPr>
           <a:xfrm xmlns:a="http://schemas.openxmlformats.org/drawingml/2006/main">
-            <a:off x="609600" y="1190625"/>
-            <a:ext cx="10972800" cy="476250"/>
+            <a:off x="609600" y="1085850"/>
+            <a:ext cx="10972800" cy="409575"/>
           </a:xfrm>
           <a:prstGeom xmlns:a="http://schemas.openxmlformats.org/drawingml/2006/main" prst="rect">
             <a:avLst/>
@@ -2942,25 +2917,25 @@
           <a:lstStyle xmlns:a="http://schemas.openxmlformats.org/drawingml/2006/main"/>
           <a:p xmlns:a="http://schemas.openxmlformats.org/drawingml/2006/main">
             <a:pPr>
-              <a:defRPr sz="2400" b="0">
+              <a:defRPr sz="2175" b="0">
                 <a:solidFill>
-                  <a:srgbClr val="242720"/>
+                  <a:srgbClr val="687572"/>
                 </a:solidFill>
-                <a:latin typeface="Arial"/>
-                <a:ea typeface="Arial"/>
-                <a:cs typeface="Arial"/>
+                <a:latin typeface="DejaVu Sans"/>
+                <a:ea typeface="DejaVu Sans"/>
+                <a:cs typeface="DejaVu Sans"/>
               </a:defRPr>
             </a:pPr>
             <a:r>
-              <a:rPr sz="2400" b="0">
+              <a:rPr sz="2175" b="0">
                 <a:solidFill>
-                  <a:srgbClr val="242720"/>
+                  <a:srgbClr val="687572"/>
                 </a:solidFill>
-                <a:latin typeface="Arial"/>
-                <a:ea typeface="Arial"/>
-                <a:cs typeface="Arial"/>
+                <a:latin typeface="DejaVu Sans"/>
+                <a:ea typeface="DejaVu Sans"/>
+                <a:cs typeface="DejaVu Sans"/>
               </a:rPr>
-              <a:t>[Add your topic or retrieval focus]</a:t>
+              <a:t>[Your topic or retrieval focus]</a:t>
             </a:r>
           </a:p>
         </p:txBody>
@@ -2970,7 +2945,7 @@
           <p:cNvPr id="3" name="">
             <a:extLst xmlns:a="http://schemas.openxmlformats.org/drawingml/2006/main">
               <a:ext uri="{FF2B5EF4-FFF2-40B4-BE49-F238E27FC236}">
-                <a16:creationId xmlns:a16="http://schemas.microsoft.com/office/drawing/2014/main" id="{D0057BAC-B085-4954-B908-E65955772031}"/>
+                <a16:creationId xmlns:a16="http://schemas.microsoft.com/office/drawing/2014/main" id="{481474C6-9A73-486E-A7EE-366C69F9DB7D}"/>
               </a:ext>
             </a:extLst>
           </p:cNvPr>
@@ -2981,8 +2956,38 @@
         </p:nvSpPr>
         <p:spPr>
           <a:xfrm xmlns:a="http://schemas.openxmlformats.org/drawingml/2006/main">
-            <a:off x="609600" y="1733550"/>
-            <a:ext cx="10972800" cy="400050"/>
+            <a:off x="609600" y="1676400"/>
+            <a:ext cx="10972800" cy="19050"/>
+          </a:xfrm>
+          <a:prstGeom xmlns:a="http://schemas.openxmlformats.org/drawingml/2006/main" prst="rect">
+            <a:avLst/>
+          </a:prstGeom>
+          <a:solidFill xmlns:a="http://schemas.openxmlformats.org/drawingml/2006/main">
+            <a:srgbClr val="A9BDB7"/>
+          </a:solidFill>
+          <a:ln xmlns:a="http://schemas.openxmlformats.org/drawingml/2006/main" w="0">
+            <a:noFill/>
+          </a:ln>
+        </p:spPr>
+      </p:sp>
+      <p:sp>
+        <p:nvSpPr>
+          <p:cNvPr id="4" name="">
+            <a:extLst xmlns:a="http://schemas.openxmlformats.org/drawingml/2006/main">
+              <a:ext uri="{FF2B5EF4-FFF2-40B4-BE49-F238E27FC236}">
+                <a16:creationId xmlns:a16="http://schemas.microsoft.com/office/drawing/2014/main" id="{0C691724-B89C-43CE-B285-46C343C18659}"/>
+              </a:ext>
+            </a:extLst>
+          </p:cNvPr>
+          <p:cNvSpPr>
+            <a:spLocks xmlns:a="http://schemas.openxmlformats.org/drawingml/2006/main" noGrp="1"/>
+          </p:cNvSpPr>
+          <p:nvPr/>
+        </p:nvSpPr>
+        <p:spPr>
+          <a:xfrm xmlns:a="http://schemas.openxmlformats.org/drawingml/2006/main">
+            <a:off x="609600" y="1828800"/>
+            <a:ext cx="4476750" cy="304800"/>
           </a:xfrm>
           <a:prstGeom xmlns:a="http://schemas.openxmlformats.org/drawingml/2006/main" prst="rect">
             <a:avLst/>
@@ -2999,35 +3004,35 @@
           <a:lstStyle xmlns:a="http://schemas.openxmlformats.org/drawingml/2006/main"/>
           <a:p xmlns:a="http://schemas.openxmlformats.org/drawingml/2006/main">
             <a:pPr>
-              <a:defRPr sz="1800" b="0">
+              <a:defRPr sz="1575" b="1">
                 <a:solidFill>
-                  <a:srgbClr val="28534A"/>
+                  <a:srgbClr val="263C3A"/>
                 </a:solidFill>
-                <a:latin typeface="Arial"/>
-                <a:ea typeface="Arial"/>
-                <a:cs typeface="Arial"/>
+                <a:latin typeface="DejaVu Sans"/>
+                <a:ea typeface="DejaVu Sans"/>
+                <a:cs typeface="DejaVu Sans"/>
               </a:defRPr>
             </a:pPr>
             <a:r>
-              <a:rPr sz="1800" b="0">
+              <a:rPr sz="1575" b="1">
                 <a:solidFill>
-                  <a:srgbClr val="28534A"/>
+                  <a:srgbClr val="263C3A"/>
                 </a:solidFill>
-                <a:latin typeface="Arial"/>
-                <a:ea typeface="Arial"/>
-                <a:cs typeface="Arial"/>
+                <a:latin typeface="DejaVu Sans"/>
+                <a:ea typeface="DejaVu Sans"/>
+                <a:cs typeface="DejaVu Sans"/>
               </a:rPr>
-              <a:t>Recall independently first. Check and improve after feedback.</a:t>
+              <a:t>01  Recall from memory</a:t>
             </a:r>
           </a:p>
         </p:txBody>
       </p:sp>
       <p:sp>
         <p:nvSpPr>
-          <p:cNvPr id="4" name="">
+          <p:cNvPr id="5" name="">
             <a:extLst xmlns:a="http://schemas.openxmlformats.org/drawingml/2006/main">
               <a:ext uri="{FF2B5EF4-FFF2-40B4-BE49-F238E27FC236}">
-                <a16:creationId xmlns:a16="http://schemas.microsoft.com/office/drawing/2014/main" id="{965D171E-B20B-4D0F-8F02-E737FB547A00}"/>
+                <a16:creationId xmlns:a16="http://schemas.microsoft.com/office/drawing/2014/main" id="{DD4057F8-D778-482E-B4E8-F05B673A2FFA}"/>
               </a:ext>
             </a:extLst>
           </p:cNvPr>
@@ -3038,21 +3043,252 @@
         </p:nvSpPr>
         <p:spPr>
           <a:xfrm xmlns:a="http://schemas.openxmlformats.org/drawingml/2006/main">
-            <a:off x="609600" y="2190750"/>
-            <a:ext cx="5400675" cy="1581150"/>
+            <a:off x="6286500" y="1828800"/>
+            <a:ext cx="5048250" cy="304800"/>
           </a:xfrm>
           <a:prstGeom xmlns:a="http://schemas.openxmlformats.org/drawingml/2006/main" prst="rect">
             <a:avLst/>
           </a:prstGeom>
           <a:noFill xmlns:a="http://schemas.openxmlformats.org/drawingml/2006/main"/>
+          <a:ln xmlns:a="http://schemas.openxmlformats.org/drawingml/2006/main" w="0">
+            <a:noFill/>
+          </a:ln>
+        </p:spPr>
+        <p:txBody>
+          <a:bodyPr xmlns:a="http://schemas.openxmlformats.org/drawingml/2006/main" lIns="0" tIns="0" rIns="0" bIns="0" anchor="t">
+            <a:noAutofit/>
+          </a:bodyPr>
+          <a:lstStyle xmlns:a="http://schemas.openxmlformats.org/drawingml/2006/main"/>
+          <a:p xmlns:a="http://schemas.openxmlformats.org/drawingml/2006/main">
+            <a:pPr>
+              <a:defRPr sz="1575" b="1">
+                <a:solidFill>
+                  <a:srgbClr val="263C3A"/>
+                </a:solidFill>
+                <a:latin typeface="DejaVu Sans"/>
+                <a:ea typeface="DejaVu Sans"/>
+                <a:cs typeface="DejaVu Sans"/>
+              </a:defRPr>
+            </a:pPr>
+            <a:r>
+              <a:rPr sz="1575" b="1">
+                <a:solidFill>
+                  <a:srgbClr val="263C3A"/>
+                </a:solidFill>
+                <a:latin typeface="DejaVu Sans"/>
+                <a:ea typeface="DejaVu Sans"/>
+                <a:cs typeface="DejaVu Sans"/>
+              </a:rPr>
+              <a:t>02  Check and improve</a:t>
+            </a:r>
+          </a:p>
+        </p:txBody>
+      </p:sp>
+      <p:sp>
+        <p:nvSpPr>
+          <p:cNvPr id="6" name="">
+            <a:extLst xmlns:a="http://schemas.openxmlformats.org/drawingml/2006/main">
+              <a:ext uri="{FF2B5EF4-FFF2-40B4-BE49-F238E27FC236}">
+                <a16:creationId xmlns:a16="http://schemas.microsoft.com/office/drawing/2014/main" id="{A599ECEE-18E6-45BA-9FEF-639610E1EEE6}"/>
+              </a:ext>
+            </a:extLst>
+          </p:cNvPr>
+          <p:cNvSpPr>
+            <a:spLocks xmlns:a="http://schemas.openxmlformats.org/drawingml/2006/main" noGrp="1"/>
+          </p:cNvSpPr>
+          <p:nvPr/>
+        </p:nvSpPr>
+        <p:spPr>
+          <a:xfrm xmlns:a="http://schemas.openxmlformats.org/drawingml/2006/main">
+            <a:off x="609600" y="2247900"/>
+            <a:ext cx="5400675" cy="1600200"/>
+          </a:xfrm>
+          <a:prstGeom xmlns:a="http://schemas.openxmlformats.org/drawingml/2006/main" prst="rect">
+            <a:avLst/>
+          </a:prstGeom>
+          <a:solidFill xmlns:a="http://schemas.openxmlformats.org/drawingml/2006/main">
+            <a:srgbClr val="EDF2F5"/>
+          </a:solidFill>
           <a:ln xmlns:a="http://schemas.openxmlformats.org/drawingml/2006/main" w="9525">
             <a:solidFill>
-              <a:srgbClr val="CBD0C4"/>
+              <a:srgbClr val="D4DFDB"/>
             </a:solidFill>
           </a:ln>
         </p:spPr>
+      </p:sp>
+      <p:sp>
+        <p:nvSpPr>
+          <p:cNvPr id="7" name="">
+            <a:extLst xmlns:a="http://schemas.openxmlformats.org/drawingml/2006/main">
+              <a:ext uri="{FF2B5EF4-FFF2-40B4-BE49-F238E27FC236}">
+                <a16:creationId xmlns:a16="http://schemas.microsoft.com/office/drawing/2014/main" id="{8C94ED36-C61A-41AF-ADC5-0DEBEC8EAE41}"/>
+              </a:ext>
+            </a:extLst>
+          </p:cNvPr>
+          <p:cNvSpPr>
+            <a:spLocks xmlns:a="http://schemas.openxmlformats.org/drawingml/2006/main" noGrp="1"/>
+          </p:cNvSpPr>
+          <p:nvPr/>
+        </p:nvSpPr>
+        <p:spPr>
+          <a:xfrm xmlns:a="http://schemas.openxmlformats.org/drawingml/2006/main">
+            <a:off x="800100" y="2419350"/>
+            <a:ext cx="381000" cy="381000"/>
+          </a:xfrm>
+          <a:prstGeom xmlns:a="http://schemas.openxmlformats.org/drawingml/2006/main" prst="ellipse">
+            <a:avLst/>
+          </a:prstGeom>
+          <a:solidFill xmlns:a="http://schemas.openxmlformats.org/drawingml/2006/main">
+            <a:srgbClr val="FFFFFF"/>
+          </a:solidFill>
+          <a:ln xmlns:a="http://schemas.openxmlformats.org/drawingml/2006/main" w="0">
+            <a:noFill/>
+          </a:ln>
+        </p:spPr>
+      </p:sp>
+      <p:sp>
+        <p:nvSpPr>
+          <p:cNvPr id="8" name="">
+            <a:extLst xmlns:a="http://schemas.openxmlformats.org/drawingml/2006/main">
+              <a:ext uri="{FF2B5EF4-FFF2-40B4-BE49-F238E27FC236}">
+                <a16:creationId xmlns:a16="http://schemas.microsoft.com/office/drawing/2014/main" id="{1425809A-96C9-45BB-A0FA-75EA57EC03E4}"/>
+              </a:ext>
+            </a:extLst>
+          </p:cNvPr>
+          <p:cNvSpPr>
+            <a:spLocks xmlns:a="http://schemas.openxmlformats.org/drawingml/2006/main" noGrp="1"/>
+          </p:cNvSpPr>
+          <p:nvPr/>
+        </p:nvSpPr>
+        <p:spPr>
+          <a:xfrm xmlns:a="http://schemas.openxmlformats.org/drawingml/2006/main">
+            <a:off x="857250" y="2486025"/>
+            <a:ext cx="342900" cy="285750"/>
+          </a:xfrm>
+          <a:prstGeom xmlns:a="http://schemas.openxmlformats.org/drawingml/2006/main" prst="rect">
+            <a:avLst/>
+          </a:prstGeom>
+          <a:noFill xmlns:a="http://schemas.openxmlformats.org/drawingml/2006/main"/>
+          <a:ln xmlns:a="http://schemas.openxmlformats.org/drawingml/2006/main" w="0">
+            <a:noFill/>
+          </a:ln>
+        </p:spPr>
         <p:txBody>
-          <a:bodyPr xmlns:a="http://schemas.openxmlformats.org/drawingml/2006/main" lIns="142875" tIns="114300" rIns="142875" bIns="0" anchor="t">
+          <a:bodyPr xmlns:a="http://schemas.openxmlformats.org/drawingml/2006/main" lIns="0" tIns="0" rIns="0" bIns="0" anchor="t">
+            <a:noAutofit/>
+          </a:bodyPr>
+          <a:lstStyle xmlns:a="http://schemas.openxmlformats.org/drawingml/2006/main"/>
+          <a:p xmlns:a="http://schemas.openxmlformats.org/drawingml/2006/main">
+            <a:pPr>
+              <a:defRPr sz="1350" b="1">
+                <a:solidFill>
+                  <a:srgbClr val="263C3A"/>
+                </a:solidFill>
+                <a:latin typeface="DejaVu Sans"/>
+                <a:ea typeface="DejaVu Sans"/>
+                <a:cs typeface="DejaVu Sans"/>
+              </a:defRPr>
+            </a:pPr>
+            <a:r>
+              <a:rPr sz="1350" b="1">
+                <a:solidFill>
+                  <a:srgbClr val="263C3A"/>
+                </a:solidFill>
+                <a:latin typeface="DejaVu Sans"/>
+                <a:ea typeface="DejaVu Sans"/>
+                <a:cs typeface="DejaVu Sans"/>
+              </a:rPr>
+              <a:t>01</a:t>
+            </a:r>
+          </a:p>
+        </p:txBody>
+      </p:sp>
+      <p:sp>
+        <p:nvSpPr>
+          <p:cNvPr id="9" name="">
+            <a:extLst xmlns:a="http://schemas.openxmlformats.org/drawingml/2006/main">
+              <a:ext uri="{FF2B5EF4-FFF2-40B4-BE49-F238E27FC236}">
+                <a16:creationId xmlns:a16="http://schemas.microsoft.com/office/drawing/2014/main" id="{DDF5D30C-2146-4625-B1AA-C446EC9ED78A}"/>
+              </a:ext>
+            </a:extLst>
+          </p:cNvPr>
+          <p:cNvSpPr>
+            <a:spLocks xmlns:a="http://schemas.openxmlformats.org/drawingml/2006/main" noGrp="1"/>
+          </p:cNvSpPr>
+          <p:nvPr/>
+        </p:nvSpPr>
+        <p:spPr>
+          <a:xfrm xmlns:a="http://schemas.openxmlformats.org/drawingml/2006/main">
+            <a:off x="1352550" y="2466975"/>
+            <a:ext cx="4467225" cy="428625"/>
+          </a:xfrm>
+          <a:prstGeom xmlns:a="http://schemas.openxmlformats.org/drawingml/2006/main" prst="rect">
+            <a:avLst/>
+          </a:prstGeom>
+          <a:noFill xmlns:a="http://schemas.openxmlformats.org/drawingml/2006/main"/>
+          <a:ln xmlns:a="http://schemas.openxmlformats.org/drawingml/2006/main" w="0">
+            <a:noFill/>
+          </a:ln>
+        </p:spPr>
+        <p:txBody>
+          <a:bodyPr xmlns:a="http://schemas.openxmlformats.org/drawingml/2006/main" lIns="0" tIns="0" rIns="0" bIns="0" anchor="t">
+            <a:noAutofit/>
+          </a:bodyPr>
+          <a:lstStyle xmlns:a="http://schemas.openxmlformats.org/drawingml/2006/main"/>
+          <a:p xmlns:a="http://schemas.openxmlformats.org/drawingml/2006/main">
+            <a:pPr>
+              <a:defRPr sz="1725" b="1">
+                <a:solidFill>
+                  <a:srgbClr val="263C3A"/>
+                </a:solidFill>
+                <a:latin typeface="DejaVu Sans"/>
+                <a:ea typeface="DejaVu Sans"/>
+                <a:cs typeface="DejaVu Sans"/>
+              </a:defRPr>
+            </a:pPr>
+            <a:r>
+              <a:rPr sz="1725" b="1">
+                <a:solidFill>
+                  <a:srgbClr val="263C3A"/>
+                </a:solidFill>
+                <a:latin typeface="DejaVu Sans"/>
+                <a:ea typeface="DejaVu Sans"/>
+                <a:cs typeface="DejaVu Sans"/>
+              </a:rPr>
+              <a:t>Prompt 1</a:t>
+            </a:r>
+          </a:p>
+        </p:txBody>
+      </p:sp>
+      <p:sp>
+        <p:nvSpPr>
+          <p:cNvPr id="10" name="">
+            <a:extLst xmlns:a="http://schemas.openxmlformats.org/drawingml/2006/main">
+              <a:ext uri="{FF2B5EF4-FFF2-40B4-BE49-F238E27FC236}">
+                <a16:creationId xmlns:a16="http://schemas.microsoft.com/office/drawing/2014/main" id="{145A2F61-0D5B-45AF-BE7D-A55FAE18C093}"/>
+              </a:ext>
+            </a:extLst>
+          </p:cNvPr>
+          <p:cNvSpPr>
+            <a:spLocks xmlns:a="http://schemas.openxmlformats.org/drawingml/2006/main" noGrp="1"/>
+          </p:cNvSpPr>
+          <p:nvPr/>
+        </p:nvSpPr>
+        <p:spPr>
+          <a:xfrm xmlns:a="http://schemas.openxmlformats.org/drawingml/2006/main">
+            <a:off x="819150" y="2990850"/>
+            <a:ext cx="4981575" cy="695325"/>
+          </a:xfrm>
+          <a:prstGeom xmlns:a="http://schemas.openxmlformats.org/drawingml/2006/main" prst="rect">
+            <a:avLst/>
+          </a:prstGeom>
+          <a:noFill xmlns:a="http://schemas.openxmlformats.org/drawingml/2006/main"/>
+          <a:ln xmlns:a="http://schemas.openxmlformats.org/drawingml/2006/main" w="0">
+            <a:noFill/>
+          </a:ln>
+        </p:spPr>
+        <p:txBody>
+          <a:bodyPr xmlns:a="http://schemas.openxmlformats.org/drawingml/2006/main" lIns="0" tIns="0" rIns="0" bIns="0" anchor="t">
             <a:noAutofit/>
           </a:bodyPr>
           <a:lstStyle xmlns:a="http://schemas.openxmlformats.org/drawingml/2006/main"/>
@@ -3060,33 +3296,33 @@
             <a:pPr>
               <a:defRPr sz="1950" b="0">
                 <a:solidFill>
-                  <a:srgbClr val="42473D"/>
+                  <a:srgbClr val="687572"/>
                 </a:solidFill>
-                <a:latin typeface="Arial"/>
-                <a:ea typeface="Arial"/>
-                <a:cs typeface="Arial"/>
+                <a:latin typeface="DejaVu Sans"/>
+                <a:ea typeface="DejaVu Sans"/>
+                <a:cs typeface="DejaVu Sans"/>
               </a:defRPr>
             </a:pPr>
             <a:r>
               <a:rPr sz="1950" b="0">
                 <a:solidFill>
-                  <a:srgbClr val="42473D"/>
+                  <a:srgbClr val="687572"/>
                 </a:solidFill>
-                <a:latin typeface="Arial"/>
-                <a:ea typeface="Arial"/>
-                <a:cs typeface="Arial"/>
+                <a:latin typeface="DejaVu Sans"/>
+                <a:ea typeface="DejaVu Sans"/>
+                <a:cs typeface="DejaVu Sans"/>
               </a:rPr>
-              <a:t>1. [Add a previously taught prompt]</a:t>
+              <a:t>[Your previously taught prompt]</a:t>
             </a:r>
           </a:p>
         </p:txBody>
       </p:sp>
       <p:sp>
         <p:nvSpPr>
-          <p:cNvPr id="5" name="">
+          <p:cNvPr id="11" name="">
             <a:extLst xmlns:a="http://schemas.openxmlformats.org/drawingml/2006/main">
               <a:ext uri="{FF2B5EF4-FFF2-40B4-BE49-F238E27FC236}">
-                <a16:creationId xmlns:a16="http://schemas.microsoft.com/office/drawing/2014/main" id="{9E181F2D-0DDC-49A4-92CA-665C181B45A5}"/>
+                <a16:creationId xmlns:a16="http://schemas.microsoft.com/office/drawing/2014/main" id="{E2E7CCCE-55D5-4DB4-804A-613497C3973E}"/>
               </a:ext>
             </a:extLst>
           </p:cNvPr>
@@ -3097,21 +3333,195 @@
         </p:nvSpPr>
         <p:spPr>
           <a:xfrm xmlns:a="http://schemas.openxmlformats.org/drawingml/2006/main">
-            <a:off x="6181725" y="2190750"/>
-            <a:ext cx="5400675" cy="1581150"/>
+            <a:off x="6181725" y="2247900"/>
+            <a:ext cx="5400675" cy="1600200"/>
           </a:xfrm>
           <a:prstGeom xmlns:a="http://schemas.openxmlformats.org/drawingml/2006/main" prst="rect">
             <a:avLst/>
           </a:prstGeom>
-          <a:noFill xmlns:a="http://schemas.openxmlformats.org/drawingml/2006/main"/>
+          <a:solidFill xmlns:a="http://schemas.openxmlformats.org/drawingml/2006/main">
+            <a:srgbClr val="EAF1EC"/>
+          </a:solidFill>
           <a:ln xmlns:a="http://schemas.openxmlformats.org/drawingml/2006/main" w="9525">
             <a:solidFill>
-              <a:srgbClr val="CBD0C4"/>
+              <a:srgbClr val="D4DFDB"/>
             </a:solidFill>
           </a:ln>
         </p:spPr>
+      </p:sp>
+      <p:sp>
+        <p:nvSpPr>
+          <p:cNvPr id="12" name="">
+            <a:extLst xmlns:a="http://schemas.openxmlformats.org/drawingml/2006/main">
+              <a:ext uri="{FF2B5EF4-FFF2-40B4-BE49-F238E27FC236}">
+                <a16:creationId xmlns:a16="http://schemas.microsoft.com/office/drawing/2014/main" id="{FF1A2A6A-2958-4F24-9DDD-ACC29E5C69E9}"/>
+              </a:ext>
+            </a:extLst>
+          </p:cNvPr>
+          <p:cNvSpPr>
+            <a:spLocks xmlns:a="http://schemas.openxmlformats.org/drawingml/2006/main" noGrp="1"/>
+          </p:cNvSpPr>
+          <p:nvPr/>
+        </p:nvSpPr>
+        <p:spPr>
+          <a:xfrm xmlns:a="http://schemas.openxmlformats.org/drawingml/2006/main">
+            <a:off x="6372225" y="2419350"/>
+            <a:ext cx="381000" cy="381000"/>
+          </a:xfrm>
+          <a:prstGeom xmlns:a="http://schemas.openxmlformats.org/drawingml/2006/main" prst="ellipse">
+            <a:avLst/>
+          </a:prstGeom>
+          <a:solidFill xmlns:a="http://schemas.openxmlformats.org/drawingml/2006/main">
+            <a:srgbClr val="FFFFFF"/>
+          </a:solidFill>
+          <a:ln xmlns:a="http://schemas.openxmlformats.org/drawingml/2006/main" w="0">
+            <a:noFill/>
+          </a:ln>
+        </p:spPr>
+      </p:sp>
+      <p:sp>
+        <p:nvSpPr>
+          <p:cNvPr id="13" name="">
+            <a:extLst xmlns:a="http://schemas.openxmlformats.org/drawingml/2006/main">
+              <a:ext uri="{FF2B5EF4-FFF2-40B4-BE49-F238E27FC236}">
+                <a16:creationId xmlns:a16="http://schemas.microsoft.com/office/drawing/2014/main" id="{27E900F2-852A-457A-9728-AFB3E095AF70}"/>
+              </a:ext>
+            </a:extLst>
+          </p:cNvPr>
+          <p:cNvSpPr>
+            <a:spLocks xmlns:a="http://schemas.openxmlformats.org/drawingml/2006/main" noGrp="1"/>
+          </p:cNvSpPr>
+          <p:nvPr/>
+        </p:nvSpPr>
+        <p:spPr>
+          <a:xfrm xmlns:a="http://schemas.openxmlformats.org/drawingml/2006/main">
+            <a:off x="6429375" y="2486025"/>
+            <a:ext cx="342900" cy="285750"/>
+          </a:xfrm>
+          <a:prstGeom xmlns:a="http://schemas.openxmlformats.org/drawingml/2006/main" prst="rect">
+            <a:avLst/>
+          </a:prstGeom>
+          <a:noFill xmlns:a="http://schemas.openxmlformats.org/drawingml/2006/main"/>
+          <a:ln xmlns:a="http://schemas.openxmlformats.org/drawingml/2006/main" w="0">
+            <a:noFill/>
+          </a:ln>
+        </p:spPr>
         <p:txBody>
-          <a:bodyPr xmlns:a="http://schemas.openxmlformats.org/drawingml/2006/main" lIns="142875" tIns="114300" rIns="142875" bIns="0" anchor="t">
+          <a:bodyPr xmlns:a="http://schemas.openxmlformats.org/drawingml/2006/main" lIns="0" tIns="0" rIns="0" bIns="0" anchor="t">
+            <a:noAutofit/>
+          </a:bodyPr>
+          <a:lstStyle xmlns:a="http://schemas.openxmlformats.org/drawingml/2006/main"/>
+          <a:p xmlns:a="http://schemas.openxmlformats.org/drawingml/2006/main">
+            <a:pPr>
+              <a:defRPr sz="1350" b="1">
+                <a:solidFill>
+                  <a:srgbClr val="263C3A"/>
+                </a:solidFill>
+                <a:latin typeface="DejaVu Sans"/>
+                <a:ea typeface="DejaVu Sans"/>
+                <a:cs typeface="DejaVu Sans"/>
+              </a:defRPr>
+            </a:pPr>
+            <a:r>
+              <a:rPr sz="1350" b="1">
+                <a:solidFill>
+                  <a:srgbClr val="263C3A"/>
+                </a:solidFill>
+                <a:latin typeface="DejaVu Sans"/>
+                <a:ea typeface="DejaVu Sans"/>
+                <a:cs typeface="DejaVu Sans"/>
+              </a:rPr>
+              <a:t>02</a:t>
+            </a:r>
+          </a:p>
+        </p:txBody>
+      </p:sp>
+      <p:sp>
+        <p:nvSpPr>
+          <p:cNvPr id="14" name="">
+            <a:extLst xmlns:a="http://schemas.openxmlformats.org/drawingml/2006/main">
+              <a:ext uri="{FF2B5EF4-FFF2-40B4-BE49-F238E27FC236}">
+                <a16:creationId xmlns:a16="http://schemas.microsoft.com/office/drawing/2014/main" id="{E0D4598C-7A5C-4179-A2A8-A6B597CDD144}"/>
+              </a:ext>
+            </a:extLst>
+          </p:cNvPr>
+          <p:cNvSpPr>
+            <a:spLocks xmlns:a="http://schemas.openxmlformats.org/drawingml/2006/main" noGrp="1"/>
+          </p:cNvSpPr>
+          <p:nvPr/>
+        </p:nvSpPr>
+        <p:spPr>
+          <a:xfrm xmlns:a="http://schemas.openxmlformats.org/drawingml/2006/main">
+            <a:off x="6924675" y="2466975"/>
+            <a:ext cx="4467225" cy="428625"/>
+          </a:xfrm>
+          <a:prstGeom xmlns:a="http://schemas.openxmlformats.org/drawingml/2006/main" prst="rect">
+            <a:avLst/>
+          </a:prstGeom>
+          <a:noFill xmlns:a="http://schemas.openxmlformats.org/drawingml/2006/main"/>
+          <a:ln xmlns:a="http://schemas.openxmlformats.org/drawingml/2006/main" w="0">
+            <a:noFill/>
+          </a:ln>
+        </p:spPr>
+        <p:txBody>
+          <a:bodyPr xmlns:a="http://schemas.openxmlformats.org/drawingml/2006/main" lIns="0" tIns="0" rIns="0" bIns="0" anchor="t">
+            <a:noAutofit/>
+          </a:bodyPr>
+          <a:lstStyle xmlns:a="http://schemas.openxmlformats.org/drawingml/2006/main"/>
+          <a:p xmlns:a="http://schemas.openxmlformats.org/drawingml/2006/main">
+            <a:pPr>
+              <a:defRPr sz="1725" b="1">
+                <a:solidFill>
+                  <a:srgbClr val="263C3A"/>
+                </a:solidFill>
+                <a:latin typeface="DejaVu Sans"/>
+                <a:ea typeface="DejaVu Sans"/>
+                <a:cs typeface="DejaVu Sans"/>
+              </a:defRPr>
+            </a:pPr>
+            <a:r>
+              <a:rPr sz="1725" b="1">
+                <a:solidFill>
+                  <a:srgbClr val="263C3A"/>
+                </a:solidFill>
+                <a:latin typeface="DejaVu Sans"/>
+                <a:ea typeface="DejaVu Sans"/>
+                <a:cs typeface="DejaVu Sans"/>
+              </a:rPr>
+              <a:t>Prompt 2</a:t>
+            </a:r>
+          </a:p>
+        </p:txBody>
+      </p:sp>
+      <p:sp>
+        <p:nvSpPr>
+          <p:cNvPr id="15" name="">
+            <a:extLst xmlns:a="http://schemas.openxmlformats.org/drawingml/2006/main">
+              <a:ext uri="{FF2B5EF4-FFF2-40B4-BE49-F238E27FC236}">
+                <a16:creationId xmlns:a16="http://schemas.microsoft.com/office/drawing/2014/main" id="{14AFE55F-2C87-4F32-90AF-B634376E1824}"/>
+              </a:ext>
+            </a:extLst>
+          </p:cNvPr>
+          <p:cNvSpPr>
+            <a:spLocks xmlns:a="http://schemas.openxmlformats.org/drawingml/2006/main" noGrp="1"/>
+          </p:cNvSpPr>
+          <p:nvPr/>
+        </p:nvSpPr>
+        <p:spPr>
+          <a:xfrm xmlns:a="http://schemas.openxmlformats.org/drawingml/2006/main">
+            <a:off x="6391275" y="2990850"/>
+            <a:ext cx="4981575" cy="695325"/>
+          </a:xfrm>
+          <a:prstGeom xmlns:a="http://schemas.openxmlformats.org/drawingml/2006/main" prst="rect">
+            <a:avLst/>
+          </a:prstGeom>
+          <a:noFill xmlns:a="http://schemas.openxmlformats.org/drawingml/2006/main"/>
+          <a:ln xmlns:a="http://schemas.openxmlformats.org/drawingml/2006/main" w="0">
+            <a:noFill/>
+          </a:ln>
+        </p:spPr>
+        <p:txBody>
+          <a:bodyPr xmlns:a="http://schemas.openxmlformats.org/drawingml/2006/main" lIns="0" tIns="0" rIns="0" bIns="0" anchor="t">
             <a:noAutofit/>
           </a:bodyPr>
           <a:lstStyle xmlns:a="http://schemas.openxmlformats.org/drawingml/2006/main"/>
@@ -3119,33 +3529,33 @@
             <a:pPr>
               <a:defRPr sz="1950" b="0">
                 <a:solidFill>
-                  <a:srgbClr val="42473D"/>
+                  <a:srgbClr val="687572"/>
                 </a:solidFill>
-                <a:latin typeface="Arial"/>
-                <a:ea typeface="Arial"/>
-                <a:cs typeface="Arial"/>
+                <a:latin typeface="DejaVu Sans"/>
+                <a:ea typeface="DejaVu Sans"/>
+                <a:cs typeface="DejaVu Sans"/>
               </a:defRPr>
             </a:pPr>
             <a:r>
               <a:rPr sz="1950" b="0">
                 <a:solidFill>
-                  <a:srgbClr val="42473D"/>
+                  <a:srgbClr val="687572"/>
                 </a:solidFill>
-                <a:latin typeface="Arial"/>
-                <a:ea typeface="Arial"/>
-                <a:cs typeface="Arial"/>
+                <a:latin typeface="DejaVu Sans"/>
+                <a:ea typeface="DejaVu Sans"/>
+                <a:cs typeface="DejaVu Sans"/>
               </a:rPr>
-              <a:t>2. [Add a previously taught prompt]</a:t>
+              <a:t>[Your previously taught prompt]</a:t>
             </a:r>
           </a:p>
         </p:txBody>
       </p:sp>
       <p:sp>
         <p:nvSpPr>
-          <p:cNvPr id="6" name="">
+          <p:cNvPr id="16" name="">
             <a:extLst xmlns:a="http://schemas.openxmlformats.org/drawingml/2006/main">
               <a:ext uri="{FF2B5EF4-FFF2-40B4-BE49-F238E27FC236}">
-                <a16:creationId xmlns:a16="http://schemas.microsoft.com/office/drawing/2014/main" id="{6716F70F-CC0F-4D80-9BC8-4007333D7BF2}"/>
+                <a16:creationId xmlns:a16="http://schemas.microsoft.com/office/drawing/2014/main" id="{69AE43C7-3E35-40FB-9A42-2C116E04854A}"/>
               </a:ext>
             </a:extLst>
           </p:cNvPr>
@@ -3156,21 +3566,195 @@
         </p:nvSpPr>
         <p:spPr>
           <a:xfrm xmlns:a="http://schemas.openxmlformats.org/drawingml/2006/main">
-            <a:off x="609600" y="3943350"/>
-            <a:ext cx="5400675" cy="1581150"/>
+            <a:off x="609600" y="4019550"/>
+            <a:ext cx="5400675" cy="1600200"/>
           </a:xfrm>
           <a:prstGeom xmlns:a="http://schemas.openxmlformats.org/drawingml/2006/main" prst="rect">
             <a:avLst/>
           </a:prstGeom>
-          <a:noFill xmlns:a="http://schemas.openxmlformats.org/drawingml/2006/main"/>
+          <a:solidFill xmlns:a="http://schemas.openxmlformats.org/drawingml/2006/main">
+            <a:srgbClr val="EDF2F5"/>
+          </a:solidFill>
           <a:ln xmlns:a="http://schemas.openxmlformats.org/drawingml/2006/main" w="9525">
             <a:solidFill>
-              <a:srgbClr val="CBD0C4"/>
+              <a:srgbClr val="D4DFDB"/>
             </a:solidFill>
           </a:ln>
         </p:spPr>
+      </p:sp>
+      <p:sp>
+        <p:nvSpPr>
+          <p:cNvPr id="17" name="">
+            <a:extLst xmlns:a="http://schemas.openxmlformats.org/drawingml/2006/main">
+              <a:ext uri="{FF2B5EF4-FFF2-40B4-BE49-F238E27FC236}">
+                <a16:creationId xmlns:a16="http://schemas.microsoft.com/office/drawing/2014/main" id="{60D7BC66-2550-4DB4-B0EE-8DC00915F06C}"/>
+              </a:ext>
+            </a:extLst>
+          </p:cNvPr>
+          <p:cNvSpPr>
+            <a:spLocks xmlns:a="http://schemas.openxmlformats.org/drawingml/2006/main" noGrp="1"/>
+          </p:cNvSpPr>
+          <p:nvPr/>
+        </p:nvSpPr>
+        <p:spPr>
+          <a:xfrm xmlns:a="http://schemas.openxmlformats.org/drawingml/2006/main">
+            <a:off x="800100" y="4191000"/>
+            <a:ext cx="381000" cy="381000"/>
+          </a:xfrm>
+          <a:prstGeom xmlns:a="http://schemas.openxmlformats.org/drawingml/2006/main" prst="ellipse">
+            <a:avLst/>
+          </a:prstGeom>
+          <a:solidFill xmlns:a="http://schemas.openxmlformats.org/drawingml/2006/main">
+            <a:srgbClr val="FFFFFF"/>
+          </a:solidFill>
+          <a:ln xmlns:a="http://schemas.openxmlformats.org/drawingml/2006/main" w="0">
+            <a:noFill/>
+          </a:ln>
+        </p:spPr>
+      </p:sp>
+      <p:sp>
+        <p:nvSpPr>
+          <p:cNvPr id="18" name="">
+            <a:extLst xmlns:a="http://schemas.openxmlformats.org/drawingml/2006/main">
+              <a:ext uri="{FF2B5EF4-FFF2-40B4-BE49-F238E27FC236}">
+                <a16:creationId xmlns:a16="http://schemas.microsoft.com/office/drawing/2014/main" id="{9EC2C7D5-2A2E-45D7-8179-CF95F694DC0C}"/>
+              </a:ext>
+            </a:extLst>
+          </p:cNvPr>
+          <p:cNvSpPr>
+            <a:spLocks xmlns:a="http://schemas.openxmlformats.org/drawingml/2006/main" noGrp="1"/>
+          </p:cNvSpPr>
+          <p:nvPr/>
+        </p:nvSpPr>
+        <p:spPr>
+          <a:xfrm xmlns:a="http://schemas.openxmlformats.org/drawingml/2006/main">
+            <a:off x="857250" y="4257675"/>
+            <a:ext cx="342900" cy="285750"/>
+          </a:xfrm>
+          <a:prstGeom xmlns:a="http://schemas.openxmlformats.org/drawingml/2006/main" prst="rect">
+            <a:avLst/>
+          </a:prstGeom>
+          <a:noFill xmlns:a="http://schemas.openxmlformats.org/drawingml/2006/main"/>
+          <a:ln xmlns:a="http://schemas.openxmlformats.org/drawingml/2006/main" w="0">
+            <a:noFill/>
+          </a:ln>
+        </p:spPr>
         <p:txBody>
-          <a:bodyPr xmlns:a="http://schemas.openxmlformats.org/drawingml/2006/main" lIns="142875" tIns="114300" rIns="142875" bIns="0" anchor="t">
+          <a:bodyPr xmlns:a="http://schemas.openxmlformats.org/drawingml/2006/main" lIns="0" tIns="0" rIns="0" bIns="0" anchor="t">
+            <a:noAutofit/>
+          </a:bodyPr>
+          <a:lstStyle xmlns:a="http://schemas.openxmlformats.org/drawingml/2006/main"/>
+          <a:p xmlns:a="http://schemas.openxmlformats.org/drawingml/2006/main">
+            <a:pPr>
+              <a:defRPr sz="1350" b="1">
+                <a:solidFill>
+                  <a:srgbClr val="263C3A"/>
+                </a:solidFill>
+                <a:latin typeface="DejaVu Sans"/>
+                <a:ea typeface="DejaVu Sans"/>
+                <a:cs typeface="DejaVu Sans"/>
+              </a:defRPr>
+            </a:pPr>
+            <a:r>
+              <a:rPr sz="1350" b="1">
+                <a:solidFill>
+                  <a:srgbClr val="263C3A"/>
+                </a:solidFill>
+                <a:latin typeface="DejaVu Sans"/>
+                <a:ea typeface="DejaVu Sans"/>
+                <a:cs typeface="DejaVu Sans"/>
+              </a:rPr>
+              <a:t>03</a:t>
+            </a:r>
+          </a:p>
+        </p:txBody>
+      </p:sp>
+      <p:sp>
+        <p:nvSpPr>
+          <p:cNvPr id="19" name="">
+            <a:extLst xmlns:a="http://schemas.openxmlformats.org/drawingml/2006/main">
+              <a:ext uri="{FF2B5EF4-FFF2-40B4-BE49-F238E27FC236}">
+                <a16:creationId xmlns:a16="http://schemas.microsoft.com/office/drawing/2014/main" id="{DA19D20B-6817-40CA-9DD7-0133249D2C3B}"/>
+              </a:ext>
+            </a:extLst>
+          </p:cNvPr>
+          <p:cNvSpPr>
+            <a:spLocks xmlns:a="http://schemas.openxmlformats.org/drawingml/2006/main" noGrp="1"/>
+          </p:cNvSpPr>
+          <p:nvPr/>
+        </p:nvSpPr>
+        <p:spPr>
+          <a:xfrm xmlns:a="http://schemas.openxmlformats.org/drawingml/2006/main">
+            <a:off x="1352550" y="4238625"/>
+            <a:ext cx="4467225" cy="428625"/>
+          </a:xfrm>
+          <a:prstGeom xmlns:a="http://schemas.openxmlformats.org/drawingml/2006/main" prst="rect">
+            <a:avLst/>
+          </a:prstGeom>
+          <a:noFill xmlns:a="http://schemas.openxmlformats.org/drawingml/2006/main"/>
+          <a:ln xmlns:a="http://schemas.openxmlformats.org/drawingml/2006/main" w="0">
+            <a:noFill/>
+          </a:ln>
+        </p:spPr>
+        <p:txBody>
+          <a:bodyPr xmlns:a="http://schemas.openxmlformats.org/drawingml/2006/main" lIns="0" tIns="0" rIns="0" bIns="0" anchor="t">
+            <a:noAutofit/>
+          </a:bodyPr>
+          <a:lstStyle xmlns:a="http://schemas.openxmlformats.org/drawingml/2006/main"/>
+          <a:p xmlns:a="http://schemas.openxmlformats.org/drawingml/2006/main">
+            <a:pPr>
+              <a:defRPr sz="1725" b="1">
+                <a:solidFill>
+                  <a:srgbClr val="263C3A"/>
+                </a:solidFill>
+                <a:latin typeface="DejaVu Sans"/>
+                <a:ea typeface="DejaVu Sans"/>
+                <a:cs typeface="DejaVu Sans"/>
+              </a:defRPr>
+            </a:pPr>
+            <a:r>
+              <a:rPr sz="1725" b="1">
+                <a:solidFill>
+                  <a:srgbClr val="263C3A"/>
+                </a:solidFill>
+                <a:latin typeface="DejaVu Sans"/>
+                <a:ea typeface="DejaVu Sans"/>
+                <a:cs typeface="DejaVu Sans"/>
+              </a:rPr>
+              <a:t>Prompt 3</a:t>
+            </a:r>
+          </a:p>
+        </p:txBody>
+      </p:sp>
+      <p:sp>
+        <p:nvSpPr>
+          <p:cNvPr id="20" name="">
+            <a:extLst xmlns:a="http://schemas.openxmlformats.org/drawingml/2006/main">
+              <a:ext uri="{FF2B5EF4-FFF2-40B4-BE49-F238E27FC236}">
+                <a16:creationId xmlns:a16="http://schemas.microsoft.com/office/drawing/2014/main" id="{B896863C-794F-49CD-AA5B-7B3C79AFEDAF}"/>
+              </a:ext>
+            </a:extLst>
+          </p:cNvPr>
+          <p:cNvSpPr>
+            <a:spLocks xmlns:a="http://schemas.openxmlformats.org/drawingml/2006/main" noGrp="1"/>
+          </p:cNvSpPr>
+          <p:nvPr/>
+        </p:nvSpPr>
+        <p:spPr>
+          <a:xfrm xmlns:a="http://schemas.openxmlformats.org/drawingml/2006/main">
+            <a:off x="819150" y="4762500"/>
+            <a:ext cx="4981575" cy="695325"/>
+          </a:xfrm>
+          <a:prstGeom xmlns:a="http://schemas.openxmlformats.org/drawingml/2006/main" prst="rect">
+            <a:avLst/>
+          </a:prstGeom>
+          <a:noFill xmlns:a="http://schemas.openxmlformats.org/drawingml/2006/main"/>
+          <a:ln xmlns:a="http://schemas.openxmlformats.org/drawingml/2006/main" w="0">
+            <a:noFill/>
+          </a:ln>
+        </p:spPr>
+        <p:txBody>
+          <a:bodyPr xmlns:a="http://schemas.openxmlformats.org/drawingml/2006/main" lIns="0" tIns="0" rIns="0" bIns="0" anchor="t">
             <a:noAutofit/>
           </a:bodyPr>
           <a:lstStyle xmlns:a="http://schemas.openxmlformats.org/drawingml/2006/main"/>
@@ -3178,33 +3762,33 @@
             <a:pPr>
               <a:defRPr sz="1950" b="0">
                 <a:solidFill>
-                  <a:srgbClr val="42473D"/>
+                  <a:srgbClr val="687572"/>
                 </a:solidFill>
-                <a:latin typeface="Arial"/>
-                <a:ea typeface="Arial"/>
-                <a:cs typeface="Arial"/>
+                <a:latin typeface="DejaVu Sans"/>
+                <a:ea typeface="DejaVu Sans"/>
+                <a:cs typeface="DejaVu Sans"/>
               </a:defRPr>
             </a:pPr>
             <a:r>
               <a:rPr sz="1950" b="0">
                 <a:solidFill>
-                  <a:srgbClr val="42473D"/>
+                  <a:srgbClr val="687572"/>
                 </a:solidFill>
-                <a:latin typeface="Arial"/>
-                <a:ea typeface="Arial"/>
-                <a:cs typeface="Arial"/>
+                <a:latin typeface="DejaVu Sans"/>
+                <a:ea typeface="DejaVu Sans"/>
+                <a:cs typeface="DejaVu Sans"/>
               </a:rPr>
-              <a:t>3. [Add a previously taught prompt]</a:t>
+              <a:t>[Your previously taught prompt]</a:t>
             </a:r>
           </a:p>
         </p:txBody>
       </p:sp>
       <p:sp>
         <p:nvSpPr>
-          <p:cNvPr id="7" name="">
+          <p:cNvPr id="21" name="">
             <a:extLst xmlns:a="http://schemas.openxmlformats.org/drawingml/2006/main">
               <a:ext uri="{FF2B5EF4-FFF2-40B4-BE49-F238E27FC236}">
-                <a16:creationId xmlns:a16="http://schemas.microsoft.com/office/drawing/2014/main" id="{2BC814BE-7249-4CCE-A1A5-FD1E64AD52E9}"/>
+                <a16:creationId xmlns:a16="http://schemas.microsoft.com/office/drawing/2014/main" id="{98194E0B-7EB9-4FD3-8A39-794170B648C2}"/>
               </a:ext>
             </a:extLst>
           </p:cNvPr>
@@ -3215,21 +3799,195 @@
         </p:nvSpPr>
         <p:spPr>
           <a:xfrm xmlns:a="http://schemas.openxmlformats.org/drawingml/2006/main">
-            <a:off x="6181725" y="3943350"/>
-            <a:ext cx="5400675" cy="1581150"/>
+            <a:off x="6181725" y="4019550"/>
+            <a:ext cx="5400675" cy="1600200"/>
           </a:xfrm>
           <a:prstGeom xmlns:a="http://schemas.openxmlformats.org/drawingml/2006/main" prst="rect">
             <a:avLst/>
           </a:prstGeom>
-          <a:noFill xmlns:a="http://schemas.openxmlformats.org/drawingml/2006/main"/>
+          <a:solidFill xmlns:a="http://schemas.openxmlformats.org/drawingml/2006/main">
+            <a:srgbClr val="EAF1EC"/>
+          </a:solidFill>
           <a:ln xmlns:a="http://schemas.openxmlformats.org/drawingml/2006/main" w="9525">
             <a:solidFill>
-              <a:srgbClr val="CBD0C4"/>
+              <a:srgbClr val="D4DFDB"/>
             </a:solidFill>
           </a:ln>
         </p:spPr>
+      </p:sp>
+      <p:sp>
+        <p:nvSpPr>
+          <p:cNvPr id="22" name="">
+            <a:extLst xmlns:a="http://schemas.openxmlformats.org/drawingml/2006/main">
+              <a:ext uri="{FF2B5EF4-FFF2-40B4-BE49-F238E27FC236}">
+                <a16:creationId xmlns:a16="http://schemas.microsoft.com/office/drawing/2014/main" id="{9183F1AE-5455-4CE0-882A-B66B05A05A9A}"/>
+              </a:ext>
+            </a:extLst>
+          </p:cNvPr>
+          <p:cNvSpPr>
+            <a:spLocks xmlns:a="http://schemas.openxmlformats.org/drawingml/2006/main" noGrp="1"/>
+          </p:cNvSpPr>
+          <p:nvPr/>
+        </p:nvSpPr>
+        <p:spPr>
+          <a:xfrm xmlns:a="http://schemas.openxmlformats.org/drawingml/2006/main">
+            <a:off x="6372225" y="4191000"/>
+            <a:ext cx="381000" cy="381000"/>
+          </a:xfrm>
+          <a:prstGeom xmlns:a="http://schemas.openxmlformats.org/drawingml/2006/main" prst="ellipse">
+            <a:avLst/>
+          </a:prstGeom>
+          <a:solidFill xmlns:a="http://schemas.openxmlformats.org/drawingml/2006/main">
+            <a:srgbClr val="FFFFFF"/>
+          </a:solidFill>
+          <a:ln xmlns:a="http://schemas.openxmlformats.org/drawingml/2006/main" w="0">
+            <a:noFill/>
+          </a:ln>
+        </p:spPr>
+      </p:sp>
+      <p:sp>
+        <p:nvSpPr>
+          <p:cNvPr id="23" name="">
+            <a:extLst xmlns:a="http://schemas.openxmlformats.org/drawingml/2006/main">
+              <a:ext uri="{FF2B5EF4-FFF2-40B4-BE49-F238E27FC236}">
+                <a16:creationId xmlns:a16="http://schemas.microsoft.com/office/drawing/2014/main" id="{BF155288-6E12-4E6C-9648-0429855797C2}"/>
+              </a:ext>
+            </a:extLst>
+          </p:cNvPr>
+          <p:cNvSpPr>
+            <a:spLocks xmlns:a="http://schemas.openxmlformats.org/drawingml/2006/main" noGrp="1"/>
+          </p:cNvSpPr>
+          <p:nvPr/>
+        </p:nvSpPr>
+        <p:spPr>
+          <a:xfrm xmlns:a="http://schemas.openxmlformats.org/drawingml/2006/main">
+            <a:off x="6429375" y="4257675"/>
+            <a:ext cx="342900" cy="285750"/>
+          </a:xfrm>
+          <a:prstGeom xmlns:a="http://schemas.openxmlformats.org/drawingml/2006/main" prst="rect">
+            <a:avLst/>
+          </a:prstGeom>
+          <a:noFill xmlns:a="http://schemas.openxmlformats.org/drawingml/2006/main"/>
+          <a:ln xmlns:a="http://schemas.openxmlformats.org/drawingml/2006/main" w="0">
+            <a:noFill/>
+          </a:ln>
+        </p:spPr>
         <p:txBody>
-          <a:bodyPr xmlns:a="http://schemas.openxmlformats.org/drawingml/2006/main" lIns="142875" tIns="114300" rIns="142875" bIns="0" anchor="t">
+          <a:bodyPr xmlns:a="http://schemas.openxmlformats.org/drawingml/2006/main" lIns="0" tIns="0" rIns="0" bIns="0" anchor="t">
+            <a:noAutofit/>
+          </a:bodyPr>
+          <a:lstStyle xmlns:a="http://schemas.openxmlformats.org/drawingml/2006/main"/>
+          <a:p xmlns:a="http://schemas.openxmlformats.org/drawingml/2006/main">
+            <a:pPr>
+              <a:defRPr sz="1350" b="1">
+                <a:solidFill>
+                  <a:srgbClr val="263C3A"/>
+                </a:solidFill>
+                <a:latin typeface="DejaVu Sans"/>
+                <a:ea typeface="DejaVu Sans"/>
+                <a:cs typeface="DejaVu Sans"/>
+              </a:defRPr>
+            </a:pPr>
+            <a:r>
+              <a:rPr sz="1350" b="1">
+                <a:solidFill>
+                  <a:srgbClr val="263C3A"/>
+                </a:solidFill>
+                <a:latin typeface="DejaVu Sans"/>
+                <a:ea typeface="DejaVu Sans"/>
+                <a:cs typeface="DejaVu Sans"/>
+              </a:rPr>
+              <a:t>04</a:t>
+            </a:r>
+          </a:p>
+        </p:txBody>
+      </p:sp>
+      <p:sp>
+        <p:nvSpPr>
+          <p:cNvPr id="24" name="">
+            <a:extLst xmlns:a="http://schemas.openxmlformats.org/drawingml/2006/main">
+              <a:ext uri="{FF2B5EF4-FFF2-40B4-BE49-F238E27FC236}">
+                <a16:creationId xmlns:a16="http://schemas.microsoft.com/office/drawing/2014/main" id="{37E9578A-D1BC-42F5-978A-CD66F697F1FB}"/>
+              </a:ext>
+            </a:extLst>
+          </p:cNvPr>
+          <p:cNvSpPr>
+            <a:spLocks xmlns:a="http://schemas.openxmlformats.org/drawingml/2006/main" noGrp="1"/>
+          </p:cNvSpPr>
+          <p:nvPr/>
+        </p:nvSpPr>
+        <p:spPr>
+          <a:xfrm xmlns:a="http://schemas.openxmlformats.org/drawingml/2006/main">
+            <a:off x="6924675" y="4238625"/>
+            <a:ext cx="4467225" cy="428625"/>
+          </a:xfrm>
+          <a:prstGeom xmlns:a="http://schemas.openxmlformats.org/drawingml/2006/main" prst="rect">
+            <a:avLst/>
+          </a:prstGeom>
+          <a:noFill xmlns:a="http://schemas.openxmlformats.org/drawingml/2006/main"/>
+          <a:ln xmlns:a="http://schemas.openxmlformats.org/drawingml/2006/main" w="0">
+            <a:noFill/>
+          </a:ln>
+        </p:spPr>
+        <p:txBody>
+          <a:bodyPr xmlns:a="http://schemas.openxmlformats.org/drawingml/2006/main" lIns="0" tIns="0" rIns="0" bIns="0" anchor="t">
+            <a:noAutofit/>
+          </a:bodyPr>
+          <a:lstStyle xmlns:a="http://schemas.openxmlformats.org/drawingml/2006/main"/>
+          <a:p xmlns:a="http://schemas.openxmlformats.org/drawingml/2006/main">
+            <a:pPr>
+              <a:defRPr sz="1725" b="1">
+                <a:solidFill>
+                  <a:srgbClr val="263C3A"/>
+                </a:solidFill>
+                <a:latin typeface="DejaVu Sans"/>
+                <a:ea typeface="DejaVu Sans"/>
+                <a:cs typeface="DejaVu Sans"/>
+              </a:defRPr>
+            </a:pPr>
+            <a:r>
+              <a:rPr sz="1725" b="1">
+                <a:solidFill>
+                  <a:srgbClr val="263C3A"/>
+                </a:solidFill>
+                <a:latin typeface="DejaVu Sans"/>
+                <a:ea typeface="DejaVu Sans"/>
+                <a:cs typeface="DejaVu Sans"/>
+              </a:rPr>
+              <a:t>Prompt 4</a:t>
+            </a:r>
+          </a:p>
+        </p:txBody>
+      </p:sp>
+      <p:sp>
+        <p:nvSpPr>
+          <p:cNvPr id="25" name="">
+            <a:extLst xmlns:a="http://schemas.openxmlformats.org/drawingml/2006/main">
+              <a:ext uri="{FF2B5EF4-FFF2-40B4-BE49-F238E27FC236}">
+                <a16:creationId xmlns:a16="http://schemas.microsoft.com/office/drawing/2014/main" id="{040FB17C-1865-45CB-8D99-C882CE40CD77}"/>
+              </a:ext>
+            </a:extLst>
+          </p:cNvPr>
+          <p:cNvSpPr>
+            <a:spLocks xmlns:a="http://schemas.openxmlformats.org/drawingml/2006/main" noGrp="1"/>
+          </p:cNvSpPr>
+          <p:nvPr/>
+        </p:nvSpPr>
+        <p:spPr>
+          <a:xfrm xmlns:a="http://schemas.openxmlformats.org/drawingml/2006/main">
+            <a:off x="6391275" y="4762500"/>
+            <a:ext cx="4981575" cy="695325"/>
+          </a:xfrm>
+          <a:prstGeom xmlns:a="http://schemas.openxmlformats.org/drawingml/2006/main" prst="rect">
+            <a:avLst/>
+          </a:prstGeom>
+          <a:noFill xmlns:a="http://schemas.openxmlformats.org/drawingml/2006/main"/>
+          <a:ln xmlns:a="http://schemas.openxmlformats.org/drawingml/2006/main" w="0">
+            <a:noFill/>
+          </a:ln>
+        </p:spPr>
+        <p:txBody>
+          <a:bodyPr xmlns:a="http://schemas.openxmlformats.org/drawingml/2006/main" lIns="0" tIns="0" rIns="0" bIns="0" anchor="t">
             <a:noAutofit/>
           </a:bodyPr>
           <a:lstStyle xmlns:a="http://schemas.openxmlformats.org/drawingml/2006/main"/>
@@ -3237,33 +3995,33 @@
             <a:pPr>
               <a:defRPr sz="1950" b="0">
                 <a:solidFill>
-                  <a:srgbClr val="42473D"/>
+                  <a:srgbClr val="687572"/>
                 </a:solidFill>
-                <a:latin typeface="Arial"/>
-                <a:ea typeface="Arial"/>
-                <a:cs typeface="Arial"/>
+                <a:latin typeface="DejaVu Sans"/>
+                <a:ea typeface="DejaVu Sans"/>
+                <a:cs typeface="DejaVu Sans"/>
               </a:defRPr>
             </a:pPr>
             <a:r>
               <a:rPr sz="1950" b="0">
                 <a:solidFill>
-                  <a:srgbClr val="42473D"/>
+                  <a:srgbClr val="687572"/>
                 </a:solidFill>
-                <a:latin typeface="Arial"/>
-                <a:ea typeface="Arial"/>
-                <a:cs typeface="Arial"/>
+                <a:latin typeface="DejaVu Sans"/>
+                <a:ea typeface="DejaVu Sans"/>
+                <a:cs typeface="DejaVu Sans"/>
               </a:rPr>
-              <a:t>4. [Add a previously taught prompt]</a:t>
+              <a:t>[Your previously taught prompt]</a:t>
             </a:r>
           </a:p>
         </p:txBody>
       </p:sp>
       <p:sp>
         <p:nvSpPr>
-          <p:cNvPr id="8" name="">
+          <p:cNvPr id="26" name="">
             <a:extLst xmlns:a="http://schemas.openxmlformats.org/drawingml/2006/main">
               <a:ext uri="{FF2B5EF4-FFF2-40B4-BE49-F238E27FC236}">
-                <a16:creationId xmlns:a16="http://schemas.microsoft.com/office/drawing/2014/main" id="{76F4899A-FC63-40CD-AE8B-C22462D7D239}"/>
+                <a16:creationId xmlns:a16="http://schemas.microsoft.com/office/drawing/2014/main" id="{1FC158D8-24C3-4018-AF3F-85455B251CA9}"/>
               </a:ext>
             </a:extLst>
           </p:cNvPr>
@@ -3275,7 +4033,37 @@
         <p:spPr>
           <a:xfrm xmlns:a="http://schemas.openxmlformats.org/drawingml/2006/main">
             <a:off x="609600" y="5953125"/>
-            <a:ext cx="10972800" cy="381000"/>
+            <a:ext cx="10972800" cy="9525"/>
+          </a:xfrm>
+          <a:prstGeom xmlns:a="http://schemas.openxmlformats.org/drawingml/2006/main" prst="rect">
+            <a:avLst/>
+          </a:prstGeom>
+          <a:solidFill xmlns:a="http://schemas.openxmlformats.org/drawingml/2006/main">
+            <a:srgbClr val="A9BDB7"/>
+          </a:solidFill>
+          <a:ln xmlns:a="http://schemas.openxmlformats.org/drawingml/2006/main" w="0">
+            <a:noFill/>
+          </a:ln>
+        </p:spPr>
+      </p:sp>
+      <p:sp>
+        <p:nvSpPr>
+          <p:cNvPr id="27" name="">
+            <a:extLst xmlns:a="http://schemas.openxmlformats.org/drawingml/2006/main">
+              <a:ext uri="{FF2B5EF4-FFF2-40B4-BE49-F238E27FC236}">
+                <a16:creationId xmlns:a16="http://schemas.microsoft.com/office/drawing/2014/main" id="{3B28E88A-D082-4725-BBE0-ED1B841B36DE}"/>
+              </a:ext>
+            </a:extLst>
+          </p:cNvPr>
+          <p:cNvSpPr>
+            <a:spLocks xmlns:a="http://schemas.openxmlformats.org/drawingml/2006/main" noGrp="1"/>
+          </p:cNvSpPr>
+          <p:nvPr/>
+        </p:nvSpPr>
+        <p:spPr>
+          <a:xfrm xmlns:a="http://schemas.openxmlformats.org/drawingml/2006/main">
+            <a:off x="609600" y="6191250"/>
+            <a:ext cx="3238500" cy="361950"/>
           </a:xfrm>
           <a:prstGeom xmlns:a="http://schemas.openxmlformats.org/drawingml/2006/main" prst="rect">
             <a:avLst/>
@@ -3292,35 +4080,35 @@
           <a:lstStyle xmlns:a="http://schemas.openxmlformats.org/drawingml/2006/main"/>
           <a:p xmlns:a="http://schemas.openxmlformats.org/drawingml/2006/main">
             <a:pPr>
-              <a:defRPr sz="1800" b="0">
+              <a:defRPr sz="1650" b="0">
                 <a:solidFill>
-                  <a:srgbClr val="28534A"/>
+                  <a:srgbClr val="687572"/>
                 </a:solidFill>
-                <a:latin typeface="Arial"/>
-                <a:ea typeface="Arial"/>
-                <a:cs typeface="Arial"/>
+                <a:latin typeface="DejaVu Sans"/>
+                <a:ea typeface="DejaVu Sans"/>
+                <a:cs typeface="DejaVu Sans"/>
               </a:defRPr>
             </a:pPr>
             <a:r>
-              <a:rPr sz="1800" b="0">
+              <a:rPr sz="1650" b="0">
                 <a:solidFill>
-                  <a:srgbClr val="28534A"/>
+                  <a:srgbClr val="687572"/>
                 </a:solidFill>
-                <a:latin typeface="Arial"/>
-                <a:ea typeface="Arial"/>
-                <a:cs typeface="Arial"/>
+                <a:latin typeface="DejaVu Sans"/>
+                <a:ea typeface="DejaVu Sans"/>
+                <a:cs typeface="DejaVu Sans"/>
               </a:rPr>
-              <a:t>Time: [Add minutes]     Check: [Add your feedback routine]</a:t>
+              <a:t>Time: [Minutes]</a:t>
             </a:r>
           </a:p>
         </p:txBody>
       </p:sp>
       <p:sp>
         <p:nvSpPr>
-          <p:cNvPr id="9" name="">
+          <p:cNvPr id="28" name="">
             <a:extLst xmlns:a="http://schemas.openxmlformats.org/drawingml/2006/main">
               <a:ext uri="{FF2B5EF4-FFF2-40B4-BE49-F238E27FC236}">
-                <a16:creationId xmlns:a16="http://schemas.microsoft.com/office/drawing/2014/main" id="{7B233229-5631-49F7-A49E-06E2DDFD0F4A}"/>
+                <a16:creationId xmlns:a16="http://schemas.microsoft.com/office/drawing/2014/main" id="{3C44718E-5B53-4A06-9FCE-053E05993CFE}"/>
               </a:ext>
             </a:extLst>
           </p:cNvPr>
@@ -3331,8 +4119,8 @@
         </p:nvSpPr>
         <p:spPr>
           <a:xfrm xmlns:a="http://schemas.openxmlformats.org/drawingml/2006/main">
-            <a:off x="609600" y="6534150"/>
-            <a:ext cx="10972800" cy="209550"/>
+            <a:off x="4286250" y="6191250"/>
+            <a:ext cx="7296150" cy="361950"/>
           </a:xfrm>
           <a:prstGeom xmlns:a="http://schemas.openxmlformats.org/drawingml/2006/main" prst="rect">
             <a:avLst/>
@@ -3349,25 +4137,25 @@
           <a:lstStyle xmlns:a="http://schemas.openxmlformats.org/drawingml/2006/main"/>
           <a:p xmlns:a="http://schemas.openxmlformats.org/drawingml/2006/main">
             <a:pPr>
-              <a:defRPr sz="1050" b="0">
+              <a:defRPr sz="1650" b="0">
                 <a:solidFill>
-                  <a:srgbClr val="62675C"/>
+                  <a:srgbClr val="687572"/>
                 </a:solidFill>
-                <a:latin typeface="Arial"/>
-                <a:ea typeface="Arial"/>
-                <a:cs typeface="Arial"/>
+                <a:latin typeface="DejaVu Sans"/>
+                <a:ea typeface="DejaVu Sans"/>
+                <a:cs typeface="DejaVu Sans"/>
               </a:defRPr>
             </a:pPr>
             <a:r>
-              <a:rPr sz="1050" b="0">
+              <a:rPr sz="1650" b="0">
                 <a:solidFill>
-                  <a:srgbClr val="62675C"/>
+                  <a:srgbClr val="687572"/>
                 </a:solidFill>
-                <a:latin typeface="Arial"/>
-                <a:ea typeface="Arial"/>
-                <a:cs typeface="Arial"/>
+                <a:latin typeface="DejaVu Sans"/>
+                <a:ea typeface="DejaVu Sans"/>
+                <a:cs typeface="DejaVu Sans"/>
               </a:rPr>
-              <a:t>TNT Teaching Tools   Editable classroom template   Source and teacher guidance in speaker notes</a:t>
+              <a:t>Feedback: [Your checking routine]</a:t>
             </a:r>
           </a:p>
         </p:txBody>
@@ -3375,7 +4163,7 @@
     </p:spTree>
     <p:extLst>
       <p:ext uri="{BB962C8B-B14F-4D97-AF65-F5344CB8AC3E}">
-        <p14:creationId xmlns:p14="http://schemas.microsoft.com/office/powerpoint/2010/main" val="1431257477"/>
+        <p14:creationId xmlns:p14="http://schemas.microsoft.com/office/powerpoint/2010/main" val="744040512"/>
       </p:ext>
     </p:extLst>
   </p:cSld>
